--- a/u10b_sorts/notes/nlogn_quickSort/nlogn_quickSort.pptx
+++ b/u10b_sorts/notes/nlogn_quickSort/nlogn_quickSort.pptx
@@ -1318,7 +1318,7 @@
           <a:bodyPr/>
           <a:lstStyle/>
           <a:p>
-            <a:endParaRPr lang="en-US" altLang="en-US"/>
+            <a:endParaRPr lang="en-US" altLang="en-US" dirty="0"/>
           </a:p>
         </p:txBody>
       </p:sp>
@@ -6055,7 +6055,7 @@
               <a:rPr lang="en-US" altLang="en-US" sz="2400" b="0" dirty="0">
                 <a:latin typeface="Tahoma" panose="020B0604030504040204" pitchFamily="34" charset="0"/>
               </a:rPr>
-              <a:t>int partition(int[] stuff, int low, int high) </a:t>
+              <a:t>int partition(int[] stuff, int start, int end) </a:t>
             </a:r>
           </a:p>
           <a:p>
@@ -6085,7 +6085,7 @@
               <a:rPr lang="en-US" altLang="en-US" sz="2400" b="0" dirty="0">
                 <a:latin typeface="Tahoma" panose="020B0604030504040204" pitchFamily="34" charset="0"/>
               </a:rPr>
-              <a:t>   int pivot = stuff[low]; </a:t>
+              <a:t>   int pivot = stuff[start]; </a:t>
             </a:r>
           </a:p>
           <a:p>
@@ -6100,7 +6100,7 @@
               <a:rPr lang="en-US" altLang="en-US" sz="2400" b="0" dirty="0">
                 <a:latin typeface="Tahoma" panose="020B0604030504040204" pitchFamily="34" charset="0"/>
               </a:rPr>
-              <a:t>   int i = low; </a:t>
+              <a:t>   int i = start; </a:t>
             </a:r>
           </a:p>
           <a:p>
@@ -6115,7 +6115,7 @@
               <a:rPr lang="en-US" altLang="en-US" sz="2400" b="0" dirty="0">
                 <a:latin typeface="Tahoma" panose="020B0604030504040204" pitchFamily="34" charset="0"/>
               </a:rPr>
-              <a:t>   int j = high;		</a:t>
+              <a:t>   int j = end;		</a:t>
             </a:r>
           </a:p>
           <a:p>
@@ -6142,22 +6142,44 @@
               <a:buNone/>
             </a:pPr>
             <a:r>
-              <a:rPr lang="en-US" altLang="en-US" sz="2400" b="0" dirty="0">
-                <a:latin typeface="Tahoma" panose="020B0604030504040204" pitchFamily="34" charset="0"/>
-              </a:rPr>
-              <a:t>      while (i &lt; j &amp;&amp; </a:t>
-            </a:r>
-            <a:r>
               <a:rPr lang="en-US" altLang="en-US" sz="2400" dirty="0">
                 <a:latin typeface="Tahoma" panose="020B0604030504040204" pitchFamily="34" charset="0"/>
               </a:rPr>
+              <a:t>      while (</a:t>
+            </a:r>
+            <a:r>
+              <a:rPr lang="en-US" altLang="en-US" sz="2400" dirty="0">
+                <a:solidFill>
+                  <a:schemeClr val="accent1">
+                    <a:lumMod val="50000"/>
+                  </a:schemeClr>
+                </a:solidFill>
+                <a:latin typeface="Tahoma" panose="020B0604030504040204" pitchFamily="34" charset="0"/>
+              </a:rPr>
+              <a:t>i &lt; j </a:t>
+            </a:r>
+            <a:r>
+              <a:rPr lang="en-US" altLang="en-US" sz="2400" dirty="0">
+                <a:latin typeface="Tahoma" panose="020B0604030504040204" pitchFamily="34" charset="0"/>
+              </a:rPr>
+              <a:t>&amp;&amp; </a:t>
+            </a:r>
+            <a:r>
+              <a:rPr lang="en-US" altLang="en-US" sz="2400" dirty="0">
+                <a:solidFill>
+                  <a:schemeClr val="accent2">
+                    <a:lumMod val="75000"/>
+                  </a:schemeClr>
+                </a:solidFill>
+                <a:latin typeface="Tahoma" panose="020B0604030504040204" pitchFamily="34" charset="0"/>
+              </a:rPr>
               <a:t>array[i] &lt;= pivot</a:t>
             </a:r>
             <a:r>
-              <a:rPr lang="en-US" altLang="en-US" sz="2400" b="0" dirty="0">
+              <a:rPr lang="en-US" altLang="en-US" sz="2400" dirty="0">
                 <a:latin typeface="Tahoma" panose="020B0604030504040204" pitchFamily="34" charset="0"/>
               </a:rPr>
-              <a:t>) { i += 1; }</a:t>
+              <a:t>)  i++;</a:t>
             </a:r>
           </a:p>
           <a:p>
@@ -6169,34 +6191,44 @@
               <a:buNone/>
             </a:pPr>
             <a:r>
-              <a:rPr lang="en-US" altLang="en-US" sz="2400" b="0" dirty="0">
-                <a:latin typeface="Tahoma" panose="020B0604030504040204" pitchFamily="34" charset="0"/>
-              </a:rPr>
-              <a:t>      while (i </a:t>
-            </a:r>
-            <a:r>
               <a:rPr lang="en-US" altLang="en-US" sz="2400" dirty="0">
                 <a:latin typeface="Tahoma" panose="020B0604030504040204" pitchFamily="34" charset="0"/>
               </a:rPr>
-              <a:t>&lt;=</a:t>
-            </a:r>
-            <a:r>
-              <a:rPr lang="en-US" altLang="en-US" sz="2400" b="0" dirty="0">
+              <a:t>      while (</a:t>
+            </a:r>
+            <a:r>
+              <a:rPr lang="en-US" altLang="en-US" sz="2400" dirty="0">
+                <a:solidFill>
+                  <a:schemeClr val="accent1">
+                    <a:lumMod val="50000"/>
+                  </a:schemeClr>
+                </a:solidFill>
                 <a:latin typeface="Tahoma" panose="020B0604030504040204" pitchFamily="34" charset="0"/>
               </a:rPr>
-              <a:t> j &amp;&amp; </a:t>
+              <a:t>i &lt;= j </a:t>
             </a:r>
             <a:r>
               <a:rPr lang="en-US" altLang="en-US" sz="2400" dirty="0">
                 <a:latin typeface="Tahoma" panose="020B0604030504040204" pitchFamily="34" charset="0"/>
               </a:rPr>
-              <a:t>array[j] &gt;= pivot</a:t>
-            </a:r>
-            <a:r>
-              <a:rPr lang="en-US" altLang="en-US" sz="2400" b="0" dirty="0">
+              <a:t>&amp;&amp; </a:t>
+            </a:r>
+            <a:r>
+              <a:rPr lang="en-US" altLang="en-US" sz="2400" dirty="0">
+                <a:solidFill>
+                  <a:schemeClr val="accent2">
+                    <a:lumMod val="75000"/>
+                  </a:schemeClr>
+                </a:solidFill>
                 <a:latin typeface="Tahoma" panose="020B0604030504040204" pitchFamily="34" charset="0"/>
               </a:rPr>
-              <a:t>) { j -= 1; }</a:t>
+              <a:t>array[j] &gt; pivot</a:t>
+            </a:r>
+            <a:r>
+              <a:rPr lang="en-US" altLang="en-US" sz="2400" dirty="0">
+                <a:latin typeface="Tahoma" panose="020B0604030504040204" pitchFamily="34" charset="0"/>
+              </a:rPr>
+              <a:t>)  j--; </a:t>
             </a:r>
           </a:p>
           <a:p>
@@ -6271,7 +6303,7 @@
               <a:rPr lang="en-US" altLang="en-US" sz="2400" b="0" dirty="0">
                 <a:latin typeface="Tahoma" panose="020B0604030504040204" pitchFamily="34" charset="0"/>
               </a:rPr>
-              <a:t>   swap(array, low, j);</a:t>
+              <a:t>   swap(array, start, j);</a:t>
             </a:r>
           </a:p>
           <a:p>
@@ -6306,11 +6338,710 @@
           </a:p>
         </p:txBody>
       </p:sp>
+      <p:grpSp>
+        <p:nvGrpSpPr>
+          <p:cNvPr id="8" name="Group 7">
+            <a:extLst>
+              <a:ext uri="{FF2B5EF4-FFF2-40B4-BE49-F238E27FC236}">
+                <a16:creationId xmlns:a16="http://schemas.microsoft.com/office/drawing/2014/main" id="{4543DBCA-F041-1E9A-3705-3CB8B79363BE}"/>
+              </a:ext>
+            </a:extLst>
+          </p:cNvPr>
+          <p:cNvGrpSpPr/>
+          <p:nvPr/>
+        </p:nvGrpSpPr>
+        <p:grpSpPr>
+          <a:xfrm>
+            <a:off x="4520384" y="1524000"/>
+            <a:ext cx="4071171" cy="1650023"/>
+            <a:chOff x="4520384" y="1524000"/>
+            <a:chExt cx="4071171" cy="1650023"/>
+          </a:xfrm>
+        </p:grpSpPr>
+        <p:sp>
+          <p:nvSpPr>
+            <p:cNvPr id="2" name="TextBox 1">
+              <a:extLst>
+                <a:ext uri="{FF2B5EF4-FFF2-40B4-BE49-F238E27FC236}">
+                  <a16:creationId xmlns:a16="http://schemas.microsoft.com/office/drawing/2014/main" id="{CB8F2F80-4682-9126-2BC4-26F8C1D2A10C}"/>
+                </a:ext>
+              </a:extLst>
+            </p:cNvPr>
+            <p:cNvSpPr txBox="1"/>
+            <p:nvPr/>
+          </p:nvSpPr>
+          <p:spPr>
+            <a:xfrm>
+              <a:off x="4800600" y="1524000"/>
+              <a:ext cx="3790955" cy="1384995"/>
+            </a:xfrm>
+            <a:prstGeom prst="rect">
+              <a:avLst/>
+            </a:prstGeom>
+            <a:noFill/>
+            <a:ln w="28575">
+              <a:solidFill>
+                <a:schemeClr val="accent2">
+                  <a:lumMod val="75000"/>
+                </a:schemeClr>
+              </a:solidFill>
+            </a:ln>
+          </p:spPr>
+          <p:txBody>
+            <a:bodyPr wrap="square" rtlCol="0">
+              <a:spAutoFit/>
+            </a:bodyPr>
+            <a:lstStyle/>
+            <a:p>
+              <a:r>
+                <a:rPr lang="en-US" dirty="0">
+                  <a:solidFill>
+                    <a:schemeClr val="accent2">
+                      <a:lumMod val="75000"/>
+                    </a:schemeClr>
+                  </a:solidFill>
+                </a:rPr>
+                <a:t>We want elements equal to the pivot in the left partition</a:t>
+              </a:r>
+            </a:p>
+          </p:txBody>
+        </p:sp>
+        <p:sp>
+          <p:nvSpPr>
+            <p:cNvPr id="3" name="Freeform: Shape 2">
+              <a:extLst>
+                <a:ext uri="{FF2B5EF4-FFF2-40B4-BE49-F238E27FC236}">
+                  <a16:creationId xmlns:a16="http://schemas.microsoft.com/office/drawing/2014/main" id="{2922827A-D0A5-4A5F-6B48-0C5835195F3B}"/>
+                </a:ext>
+              </a:extLst>
+            </p:cNvPr>
+            <p:cNvSpPr/>
+            <p:nvPr/>
+          </p:nvSpPr>
+          <p:spPr bwMode="auto">
+            <a:xfrm>
+              <a:off x="4520384" y="2200613"/>
+              <a:ext cx="289008" cy="973410"/>
+            </a:xfrm>
+            <a:custGeom>
+              <a:avLst/>
+              <a:gdLst>
+                <a:gd name="csX0" fmla="*/ 289008 w 289008"/>
+                <a:gd name="csY0" fmla="*/ 23841 h 973410"/>
+                <a:gd name="csX1" fmla="*/ 113162 w 289008"/>
+                <a:gd name="csY1" fmla="*/ 32633 h 973410"/>
+                <a:gd name="csX2" fmla="*/ 7654 w 289008"/>
+                <a:gd name="csY2" fmla="*/ 340364 h 973410"/>
+                <a:gd name="csX3" fmla="*/ 16447 w 289008"/>
+                <a:gd name="csY3" fmla="*/ 973410 h 973410"/>
+              </a:gdLst>
+              <a:ahLst/>
+              <a:cxnLst>
+                <a:cxn ang="0">
+                  <a:pos x="csX0" y="csY0"/>
+                </a:cxn>
+                <a:cxn ang="0">
+                  <a:pos x="csX1" y="csY1"/>
+                </a:cxn>
+                <a:cxn ang="0">
+                  <a:pos x="csX2" y="csY2"/>
+                </a:cxn>
+                <a:cxn ang="0">
+                  <a:pos x="csX3" y="csY3"/>
+                </a:cxn>
+              </a:cxnLst>
+              <a:rect l="l" t="t" r="r" b="b"/>
+              <a:pathLst>
+                <a:path w="289008" h="973410">
+                  <a:moveTo>
+                    <a:pt x="289008" y="23841"/>
+                  </a:moveTo>
+                  <a:cubicBezTo>
+                    <a:pt x="224531" y="1860"/>
+                    <a:pt x="160054" y="-20121"/>
+                    <a:pt x="113162" y="32633"/>
+                  </a:cubicBezTo>
+                  <a:cubicBezTo>
+                    <a:pt x="66270" y="85387"/>
+                    <a:pt x="23773" y="183568"/>
+                    <a:pt x="7654" y="340364"/>
+                  </a:cubicBezTo>
+                  <a:cubicBezTo>
+                    <a:pt x="-8465" y="497160"/>
+                    <a:pt x="3991" y="735285"/>
+                    <a:pt x="16447" y="973410"/>
+                  </a:cubicBezTo>
+                </a:path>
+              </a:pathLst>
+            </a:custGeom>
+            <a:noFill/>
+            <a:ln w="28575" cap="flat" cmpd="sng" algn="ctr">
+              <a:solidFill>
+                <a:schemeClr val="accent2">
+                  <a:lumMod val="75000"/>
+                </a:schemeClr>
+              </a:solidFill>
+              <a:prstDash val="solid"/>
+              <a:round/>
+              <a:headEnd type="none" w="med" len="med"/>
+              <a:tailEnd type="triangle" w="med" len="med"/>
+            </a:ln>
+            <a:effectLst/>
+            <a:extLst>
+              <a:ext uri="{AF507438-7753-43E0-B8FC-AC1667EBCBE1}">
+                <a14:hiddenEffects xmlns:a14="http://schemas.microsoft.com/office/drawing/2010/main">
+                  <a:effectLst>
+                    <a:outerShdw dist="35921" dir="2700000" algn="ctr" rotWithShape="0">
+                      <a:schemeClr val="bg2"/>
+                    </a:outerShdw>
+                  </a:effectLst>
+                </a14:hiddenEffects>
+              </a:ext>
+            </a:extLst>
+          </p:spPr>
+          <p:txBody>
+            <a:bodyPr vert="horz" wrap="square" lIns="91440" tIns="45720" rIns="91440" bIns="45720" numCol="1" rtlCol="0" anchor="t" anchorCtr="0" compatLnSpc="1">
+              <a:prstTxWarp prst="textNoShape">
+                <a:avLst/>
+              </a:prstTxWarp>
+            </a:bodyPr>
+            <a:lstStyle/>
+            <a:p>
+              <a:pPr marL="0" marR="0" indent="0" algn="ctr" defTabSz="914400" rtl="0" eaLnBrk="0" fontAlgn="base" latinLnBrk="0" hangingPunct="0">
+                <a:lnSpc>
+                  <a:spcPct val="100000"/>
+                </a:lnSpc>
+                <a:spcBef>
+                  <a:spcPct val="0"/>
+                </a:spcBef>
+                <a:spcAft>
+                  <a:spcPct val="0"/>
+                </a:spcAft>
+                <a:buClrTx/>
+                <a:buSzTx/>
+                <a:buFontTx/>
+                <a:buNone/>
+                <a:tabLst/>
+              </a:pPr>
+              <a:endParaRPr kumimoji="0" lang="en-US" sz="2800" b="1" i="0" u="none" strike="noStrike" cap="none" normalizeH="0" baseline="0">
+                <a:ln>
+                  <a:noFill/>
+                </a:ln>
+                <a:solidFill>
+                  <a:schemeClr val="tx1"/>
+                </a:solidFill>
+                <a:effectLst/>
+                <a:latin typeface="Tahoma" pitchFamily="34" charset="0"/>
+              </a:endParaRPr>
+            </a:p>
+          </p:txBody>
+        </p:sp>
+      </p:grpSp>
+      <p:grpSp>
+        <p:nvGrpSpPr>
+          <p:cNvPr id="7" name="Group 6">
+            <a:extLst>
+              <a:ext uri="{FF2B5EF4-FFF2-40B4-BE49-F238E27FC236}">
+                <a16:creationId xmlns:a16="http://schemas.microsoft.com/office/drawing/2014/main" id="{9C02FAB3-6638-CF6D-10A7-50CF60A599DD}"/>
+              </a:ext>
+            </a:extLst>
+          </p:cNvPr>
+          <p:cNvGrpSpPr/>
+          <p:nvPr/>
+        </p:nvGrpSpPr>
+        <p:grpSpPr>
+          <a:xfrm>
+            <a:off x="2397162" y="3868615"/>
+            <a:ext cx="6403938" cy="2678096"/>
+            <a:chOff x="2397162" y="3868615"/>
+            <a:chExt cx="6403938" cy="2678096"/>
+          </a:xfrm>
+        </p:grpSpPr>
+        <p:sp>
+          <p:nvSpPr>
+            <p:cNvPr id="4" name="TextBox 3">
+              <a:extLst>
+                <a:ext uri="{FF2B5EF4-FFF2-40B4-BE49-F238E27FC236}">
+                  <a16:creationId xmlns:a16="http://schemas.microsoft.com/office/drawing/2014/main" id="{E50D6B2F-A92F-75C4-4C58-AB90995C8CD5}"/>
+                </a:ext>
+              </a:extLst>
+            </p:cNvPr>
+            <p:cNvSpPr txBox="1"/>
+            <p:nvPr/>
+          </p:nvSpPr>
+          <p:spPr>
+            <a:xfrm>
+              <a:off x="3972547" y="4299942"/>
+              <a:ext cx="4828553" cy="2246769"/>
+            </a:xfrm>
+            <a:prstGeom prst="rect">
+              <a:avLst/>
+            </a:prstGeom>
+            <a:noFill/>
+            <a:ln w="28575">
+              <a:solidFill>
+                <a:schemeClr val="accent1">
+                  <a:lumMod val="50000"/>
+                </a:schemeClr>
+              </a:solidFill>
+            </a:ln>
+          </p:spPr>
+          <p:txBody>
+            <a:bodyPr wrap="square" rtlCol="0">
+              <a:spAutoFit/>
+            </a:bodyPr>
+            <a:lstStyle/>
+            <a:p>
+              <a:r>
+                <a:rPr lang="en-US" dirty="0">
+                  <a:solidFill>
+                    <a:schemeClr val="accent1">
+                      <a:lumMod val="50000"/>
+                    </a:schemeClr>
+                  </a:solidFill>
+                </a:rPr>
+                <a:t>If </a:t>
+              </a:r>
+              <a:r>
+                <a:rPr lang="en-US" dirty="0">
+                  <a:solidFill>
+                    <a:schemeClr val="accent1">
+                      <a:lumMod val="50000"/>
+                    </a:schemeClr>
+                  </a:solidFill>
+                  <a:latin typeface="Consolas" panose="020B0609020204030204" pitchFamily="49" charset="0"/>
+                </a:rPr>
+                <a:t>i=3</a:t>
+              </a:r>
+              <a:r>
+                <a:rPr lang="en-US" dirty="0">
+                  <a:solidFill>
+                    <a:schemeClr val="accent1">
+                      <a:lumMod val="50000"/>
+                    </a:schemeClr>
+                  </a:solidFill>
+                </a:rPr>
+                <a:t> after 1</a:t>
+              </a:r>
+              <a:r>
+                <a:rPr lang="en-US" baseline="30000" dirty="0">
+                  <a:solidFill>
+                    <a:schemeClr val="accent1">
+                      <a:lumMod val="50000"/>
+                    </a:schemeClr>
+                  </a:solidFill>
+                </a:rPr>
+                <a:t>st</a:t>
+              </a:r>
+              <a:r>
+                <a:rPr lang="en-US" dirty="0">
+                  <a:solidFill>
+                    <a:schemeClr val="accent1">
+                      <a:lumMod val="50000"/>
+                    </a:schemeClr>
+                  </a:solidFill>
+                </a:rPr>
+                <a:t> loop:</a:t>
+              </a:r>
+            </a:p>
+            <a:p>
+              <a:r>
+                <a:rPr lang="en-US" dirty="0">
+                  <a:solidFill>
+                    <a:schemeClr val="accent1">
+                      <a:lumMod val="50000"/>
+                    </a:schemeClr>
+                  </a:solidFill>
+                  <a:latin typeface="Consolas" panose="020B0609020204030204" pitchFamily="49" charset="0"/>
+                </a:rPr>
+                <a:t>       i j</a:t>
+              </a:r>
+            </a:p>
+            <a:p>
+              <a:r>
+                <a:rPr lang="en-US" dirty="0">
+                  <a:solidFill>
+                    <a:schemeClr val="accent1">
+                      <a:lumMod val="50000"/>
+                    </a:schemeClr>
+                  </a:solidFill>
+                  <a:latin typeface="Consolas" panose="020B0609020204030204" pitchFamily="49" charset="0"/>
+                </a:rPr>
+                <a:t>[5,1,4,6,9,8,7]</a:t>
+              </a:r>
+            </a:p>
+            <a:p>
+              <a:r>
+                <a:rPr lang="en-US" dirty="0">
+                  <a:solidFill>
+                    <a:schemeClr val="accent1">
+                      <a:lumMod val="50000"/>
+                    </a:schemeClr>
+                  </a:solidFill>
+                  <a:latin typeface="Consolas" panose="020B0609020204030204" pitchFamily="49" charset="0"/>
+                </a:rPr>
+                <a:t>     </a:t>
+              </a:r>
+              <a:r>
+                <a:rPr lang="en-US" dirty="0">
+                  <a:solidFill>
+                    <a:srgbClr val="7030A0"/>
+                  </a:solidFill>
+                  <a:latin typeface="Consolas" panose="020B0609020204030204" pitchFamily="49" charset="0"/>
+                </a:rPr>
+                <a:t>j</a:t>
+              </a:r>
+              <a:r>
+                <a:rPr lang="en-US" dirty="0">
+                  <a:solidFill>
+                    <a:schemeClr val="accent1">
+                      <a:lumMod val="50000"/>
+                    </a:schemeClr>
+                  </a:solidFill>
+                </a:rPr>
+                <a:t>   </a:t>
+              </a:r>
+            </a:p>
+            <a:p>
+              <a:r>
+                <a:rPr lang="en-US" dirty="0">
+                  <a:solidFill>
+                    <a:srgbClr val="7030A0"/>
+                  </a:solidFill>
+                  <a:latin typeface="Consolas" panose="020B0609020204030204" pitchFamily="49" charset="0"/>
+                </a:rPr>
+                <a:t>j</a:t>
+              </a:r>
+              <a:r>
+                <a:rPr lang="en-US" dirty="0">
+                  <a:solidFill>
+                    <a:srgbClr val="7030A0"/>
+                  </a:solidFill>
+                </a:rPr>
+                <a:t> should advance to </a:t>
+              </a:r>
+              <a:r>
+                <a:rPr lang="en-US" dirty="0">
+                  <a:solidFill>
+                    <a:srgbClr val="7030A0"/>
+                  </a:solidFill>
+                  <a:latin typeface="Consolas" panose="020B0609020204030204" pitchFamily="49" charset="0"/>
+                </a:rPr>
+                <a:t>j=2</a:t>
+              </a:r>
+            </a:p>
+          </p:txBody>
+        </p:sp>
+        <p:sp>
+          <p:nvSpPr>
+            <p:cNvPr id="6" name="Freeform: Shape 5">
+              <a:extLst>
+                <a:ext uri="{FF2B5EF4-FFF2-40B4-BE49-F238E27FC236}">
+                  <a16:creationId xmlns:a16="http://schemas.microsoft.com/office/drawing/2014/main" id="{E845A7A7-180C-C9A5-3C2C-0A218585E47B}"/>
+                </a:ext>
+              </a:extLst>
+            </p:cNvPr>
+            <p:cNvSpPr/>
+            <p:nvPr/>
+          </p:nvSpPr>
+          <p:spPr bwMode="auto">
+            <a:xfrm>
+              <a:off x="2397162" y="3868615"/>
+              <a:ext cx="1576961" cy="422031"/>
+            </a:xfrm>
+            <a:custGeom>
+              <a:avLst/>
+              <a:gdLst>
+                <a:gd name="csX0" fmla="*/ 1576961 w 1576961"/>
+                <a:gd name="csY0" fmla="*/ 422031 h 422031"/>
+                <a:gd name="csX1" fmla="*/ 1207684 w 1576961"/>
+                <a:gd name="csY1" fmla="*/ 360485 h 422031"/>
+                <a:gd name="csX2" fmla="*/ 662561 w 1576961"/>
+                <a:gd name="csY2" fmla="*/ 281354 h 422031"/>
+                <a:gd name="csX3" fmla="*/ 99853 w 1576961"/>
+                <a:gd name="csY3" fmla="*/ 149470 h 422031"/>
+                <a:gd name="csX4" fmla="*/ 3138 w 1576961"/>
+                <a:gd name="csY4" fmla="*/ 0 h 422031"/>
+              </a:gdLst>
+              <a:ahLst/>
+              <a:cxnLst>
+                <a:cxn ang="0">
+                  <a:pos x="csX0" y="csY0"/>
+                </a:cxn>
+                <a:cxn ang="0">
+                  <a:pos x="csX1" y="csY1"/>
+                </a:cxn>
+                <a:cxn ang="0">
+                  <a:pos x="csX2" y="csY2"/>
+                </a:cxn>
+                <a:cxn ang="0">
+                  <a:pos x="csX3" y="csY3"/>
+                </a:cxn>
+                <a:cxn ang="0">
+                  <a:pos x="csX4" y="csY4"/>
+                </a:cxn>
+              </a:cxnLst>
+              <a:rect l="l" t="t" r="r" b="b"/>
+              <a:pathLst>
+                <a:path w="1576961" h="422031">
+                  <a:moveTo>
+                    <a:pt x="1576961" y="422031"/>
+                  </a:moveTo>
+                  <a:lnTo>
+                    <a:pt x="1207684" y="360485"/>
+                  </a:lnTo>
+                  <a:cubicBezTo>
+                    <a:pt x="1055284" y="337039"/>
+                    <a:pt x="847199" y="316523"/>
+                    <a:pt x="662561" y="281354"/>
+                  </a:cubicBezTo>
+                  <a:cubicBezTo>
+                    <a:pt x="477922" y="246185"/>
+                    <a:pt x="209757" y="196362"/>
+                    <a:pt x="99853" y="149470"/>
+                  </a:cubicBezTo>
+                  <a:cubicBezTo>
+                    <a:pt x="-10051" y="102578"/>
+                    <a:pt x="-3457" y="51289"/>
+                    <a:pt x="3138" y="0"/>
+                  </a:cubicBezTo>
+                </a:path>
+              </a:pathLst>
+            </a:custGeom>
+            <a:noFill/>
+            <a:ln w="28575" cap="flat" cmpd="sng" algn="ctr">
+              <a:solidFill>
+                <a:schemeClr val="accent1">
+                  <a:lumMod val="50000"/>
+                </a:schemeClr>
+              </a:solidFill>
+              <a:prstDash val="solid"/>
+              <a:round/>
+              <a:headEnd type="none" w="med" len="med"/>
+              <a:tailEnd type="triangle" w="med" len="med"/>
+            </a:ln>
+            <a:effectLst/>
+            <a:extLst>
+              <a:ext uri="{AF507438-7753-43E0-B8FC-AC1667EBCBE1}">
+                <a14:hiddenEffects xmlns:a14="http://schemas.microsoft.com/office/drawing/2010/main">
+                  <a:effectLst>
+                    <a:outerShdw dist="35921" dir="2700000" algn="ctr" rotWithShape="0">
+                      <a:schemeClr val="bg2"/>
+                    </a:outerShdw>
+                  </a:effectLst>
+                </a14:hiddenEffects>
+              </a:ext>
+            </a:extLst>
+          </p:spPr>
+          <p:txBody>
+            <a:bodyPr vert="horz" wrap="square" lIns="91440" tIns="45720" rIns="91440" bIns="45720" numCol="1" rtlCol="0" anchor="t" anchorCtr="0" compatLnSpc="1">
+              <a:prstTxWarp prst="textNoShape">
+                <a:avLst/>
+              </a:prstTxWarp>
+            </a:bodyPr>
+            <a:lstStyle/>
+            <a:p>
+              <a:pPr marL="0" marR="0" indent="0" algn="ctr" defTabSz="914400" rtl="0" eaLnBrk="0" fontAlgn="base" latinLnBrk="0" hangingPunct="0">
+                <a:lnSpc>
+                  <a:spcPct val="100000"/>
+                </a:lnSpc>
+                <a:spcBef>
+                  <a:spcPct val="0"/>
+                </a:spcBef>
+                <a:spcAft>
+                  <a:spcPct val="0"/>
+                </a:spcAft>
+                <a:buClrTx/>
+                <a:buSzTx/>
+                <a:buFontTx/>
+                <a:buNone/>
+                <a:tabLst/>
+              </a:pPr>
+              <a:endParaRPr kumimoji="0" lang="en-US" sz="2800" b="1" i="0" u="none" strike="noStrike" cap="none" normalizeH="0" baseline="0">
+                <a:ln>
+                  <a:noFill/>
+                </a:ln>
+                <a:solidFill>
+                  <a:schemeClr val="tx1"/>
+                </a:solidFill>
+                <a:effectLst/>
+                <a:latin typeface="Tahoma" pitchFamily="34" charset="0"/>
+              </a:endParaRPr>
+            </a:p>
+          </p:txBody>
+        </p:sp>
+      </p:grpSp>
     </p:spTree>
   </p:cSld>
   <p:clrMapOvr>
     <a:masterClrMapping/>
   </p:clrMapOvr>
+  <p:timing>
+    <p:tnLst>
+      <p:par>
+        <p:cTn id="1" dur="indefinite" restart="never" nodeType="tmRoot">
+          <p:childTnLst>
+            <p:seq concurrent="1" nextAc="seek">
+              <p:cTn id="2" dur="indefinite" nodeType="mainSeq">
+                <p:childTnLst>
+                  <p:par>
+                    <p:cTn id="3" fill="hold">
+                      <p:stCondLst>
+                        <p:cond delay="indefinite"/>
+                      </p:stCondLst>
+                      <p:childTnLst>
+                        <p:par>
+                          <p:cTn id="4" fill="hold">
+                            <p:stCondLst>
+                              <p:cond delay="0"/>
+                            </p:stCondLst>
+                            <p:childTnLst>
+                              <p:par>
+                                <p:cTn id="5" presetID="1" presetClass="entr" presetSubtype="0" fill="hold" nodeType="clickEffect">
+                                  <p:stCondLst>
+                                    <p:cond delay="0"/>
+                                  </p:stCondLst>
+                                  <p:childTnLst>
+                                    <p:set>
+                                      <p:cBhvr>
+                                        <p:cTn id="6" dur="1" fill="hold">
+                                          <p:stCondLst>
+                                            <p:cond delay="0"/>
+                                          </p:stCondLst>
+                                        </p:cTn>
+                                        <p:tgtEl>
+                                          <p:spTgt spid="8"/>
+                                        </p:tgtEl>
+                                        <p:attrNameLst>
+                                          <p:attrName>style.visibility</p:attrName>
+                                        </p:attrNameLst>
+                                      </p:cBhvr>
+                                      <p:to>
+                                        <p:strVal val="visible"/>
+                                      </p:to>
+                                    </p:set>
+                                  </p:childTnLst>
+                                </p:cTn>
+                              </p:par>
+                            </p:childTnLst>
+                          </p:cTn>
+                        </p:par>
+                      </p:childTnLst>
+                    </p:cTn>
+                  </p:par>
+                  <p:par>
+                    <p:cTn id="7" fill="hold">
+                      <p:stCondLst>
+                        <p:cond delay="indefinite"/>
+                      </p:stCondLst>
+                      <p:childTnLst>
+                        <p:par>
+                          <p:cTn id="8" fill="hold">
+                            <p:stCondLst>
+                              <p:cond delay="0"/>
+                            </p:stCondLst>
+                            <p:childTnLst>
+                              <p:par>
+                                <p:cTn id="9" presetID="2" presetClass="entr" presetSubtype="4" fill="hold" nodeType="clickEffect">
+                                  <p:stCondLst>
+                                    <p:cond delay="0"/>
+                                  </p:stCondLst>
+                                  <p:childTnLst>
+                                    <p:set>
+                                      <p:cBhvr>
+                                        <p:cTn id="10" dur="1" fill="hold">
+                                          <p:stCondLst>
+                                            <p:cond delay="0"/>
+                                          </p:stCondLst>
+                                        </p:cTn>
+                                        <p:tgtEl>
+                                          <p:spTgt spid="7"/>
+                                        </p:tgtEl>
+                                        <p:attrNameLst>
+                                          <p:attrName>style.visibility</p:attrName>
+                                        </p:attrNameLst>
+                                      </p:cBhvr>
+                                      <p:to>
+                                        <p:strVal val="visible"/>
+                                      </p:to>
+                                    </p:set>
+                                    <p:anim calcmode="lin" valueType="num">
+                                      <p:cBhvr additive="base">
+                                        <p:cTn id="11" dur="500" fill="hold"/>
+                                        <p:tgtEl>
+                                          <p:spTgt spid="7"/>
+                                        </p:tgtEl>
+                                        <p:attrNameLst>
+                                          <p:attrName>ppt_x</p:attrName>
+                                        </p:attrNameLst>
+                                      </p:cBhvr>
+                                      <p:tavLst>
+                                        <p:tav tm="0">
+                                          <p:val>
+                                            <p:strVal val="#ppt_x"/>
+                                          </p:val>
+                                        </p:tav>
+                                        <p:tav tm="100000">
+                                          <p:val>
+                                            <p:strVal val="#ppt_x"/>
+                                          </p:val>
+                                        </p:tav>
+                                      </p:tavLst>
+                                    </p:anim>
+                                    <p:anim calcmode="lin" valueType="num">
+                                      <p:cBhvr additive="base">
+                                        <p:cTn id="12" dur="500" fill="hold"/>
+                                        <p:tgtEl>
+                                          <p:spTgt spid="7"/>
+                                        </p:tgtEl>
+                                        <p:attrNameLst>
+                                          <p:attrName>ppt_y</p:attrName>
+                                        </p:attrNameLst>
+                                      </p:cBhvr>
+                                      <p:tavLst>
+                                        <p:tav tm="0">
+                                          <p:val>
+                                            <p:strVal val="1+#ppt_h/2"/>
+                                          </p:val>
+                                        </p:tav>
+                                        <p:tav tm="100000">
+                                          <p:val>
+                                            <p:strVal val="#ppt_y"/>
+                                          </p:val>
+                                        </p:tav>
+                                      </p:tavLst>
+                                    </p:anim>
+                                  </p:childTnLst>
+                                </p:cTn>
+                              </p:par>
+                            </p:childTnLst>
+                          </p:cTn>
+                        </p:par>
+                      </p:childTnLst>
+                    </p:cTn>
+                  </p:par>
+                </p:childTnLst>
+              </p:cTn>
+              <p:prevCondLst>
+                <p:cond evt="onPrev" delay="0">
+                  <p:tgtEl>
+                    <p:sldTgt/>
+                  </p:tgtEl>
+                </p:cond>
+              </p:prevCondLst>
+              <p:nextCondLst>
+                <p:cond evt="onNext" delay="0">
+                  <p:tgtEl>
+                    <p:sldTgt/>
+                  </p:tgtEl>
+                </p:cond>
+              </p:nextCondLst>
+            </p:seq>
+          </p:childTnLst>
+        </p:cTn>
+      </p:par>
+    </p:tnLst>
+  </p:timing>
 </p:sld>
 </file>
 
@@ -16584,12 +17315,12 @@
           <a:graphicData uri="http://schemas.openxmlformats.org/presentationml/2006/ole">
             <mc:AlternateContent xmlns:mc="http://schemas.openxmlformats.org/markup-compatibility/2006">
               <mc:Choice xmlns:v="urn:schemas-microsoft-com:vml" Requires="v">
-                <p:oleObj name="Clip" r:id="rId5" imgW="4305300" imgH="3421063" progId="MS_ClipArt_Gallery.2">
+                <p:oleObj name="Clip" r:id="rId3" imgW="4305300" imgH="3421063" progId="MS_ClipArt_Gallery.2">
                   <p:embed/>
                 </p:oleObj>
               </mc:Choice>
               <mc:Fallback>
-                <p:oleObj name="Clip" r:id="rId5" imgW="4305300" imgH="3421063" progId="MS_ClipArt_Gallery.2">
+                <p:oleObj name="Clip" r:id="rId3" imgW="4305300" imgH="3421063" progId="MS_ClipArt_Gallery.2">
                   <p:embed/>
                   <p:pic>
                     <p:nvPicPr>
@@ -19885,202 +20616,6 @@
       </p:sp>
       <p:sp>
         <p:nvSpPr>
-          <p:cNvPr id="66564" name="Text Box 3">
-            <a:extLst>
-              <a:ext uri="{FF2B5EF4-FFF2-40B4-BE49-F238E27FC236}">
-                <a16:creationId xmlns:a16="http://schemas.microsoft.com/office/drawing/2014/main" id="{ED398888-443D-4602-B628-178067F966A3}"/>
-              </a:ext>
-            </a:extLst>
-          </p:cNvPr>
-          <p:cNvSpPr txBox="1">
-            <a:spLocks noChangeArrowheads="1"/>
-          </p:cNvSpPr>
-          <p:nvPr/>
-        </p:nvSpPr>
-        <p:spPr bwMode="auto">
-          <a:xfrm>
-            <a:off x="898525" y="1428750"/>
-            <a:ext cx="184150" cy="519113"/>
-          </a:xfrm>
-          <a:prstGeom prst="rect">
-            <a:avLst/>
-          </a:prstGeom>
-          <a:noFill/>
-          <a:ln>
-            <a:noFill/>
-          </a:ln>
-          <a:effectLst/>
-          <a:extLst>
-            <a:ext uri="{909E8E84-426E-40DD-AFC4-6F175D3DCCD1}">
-              <a14:hiddenFill xmlns:a14="http://schemas.microsoft.com/office/drawing/2010/main">
-                <a:solidFill>
-                  <a:schemeClr val="accent1"/>
-                </a:solidFill>
-              </a14:hiddenFill>
-            </a:ext>
-            <a:ext uri="{91240B29-F687-4F45-9708-019B960494DF}">
-              <a14:hiddenLine xmlns:a14="http://schemas.microsoft.com/office/drawing/2010/main" w="9525">
-                <a:solidFill>
-                  <a:schemeClr val="tx1"/>
-                </a:solidFill>
-                <a:miter lim="800000"/>
-                <a:headEnd/>
-                <a:tailEnd/>
-              </a14:hiddenLine>
-            </a:ext>
-            <a:ext uri="{AF507438-7753-43E0-B8FC-AC1667EBCBE1}">
-              <a14:hiddenEffects xmlns:a14="http://schemas.microsoft.com/office/drawing/2010/main">
-                <a:effectLst>
-                  <a:outerShdw dist="35921" dir="2700000" algn="ctr" rotWithShape="0">
-                    <a:schemeClr val="bg2"/>
-                  </a:outerShdw>
-                </a:effectLst>
-              </a14:hiddenEffects>
-            </a:ext>
-          </a:extLst>
-        </p:spPr>
-        <p:txBody>
-          <a:bodyPr wrap="none">
-            <a:spAutoFit/>
-          </a:bodyPr>
-          <a:lstStyle>
-            <a:lvl1pPr>
-              <a:spcBef>
-                <a:spcPct val="20000"/>
-              </a:spcBef>
-              <a:buChar char="•"/>
-              <a:defRPr sz="3200">
-                <a:solidFill>
-                  <a:schemeClr val="tx1"/>
-                </a:solidFill>
-                <a:latin typeface="Times New Roman" panose="02020603050405020304" pitchFamily="18" charset="0"/>
-              </a:defRPr>
-            </a:lvl1pPr>
-            <a:lvl2pPr marL="742950" indent="-285750">
-              <a:spcBef>
-                <a:spcPct val="20000"/>
-              </a:spcBef>
-              <a:buChar char="–"/>
-              <a:defRPr sz="2800">
-                <a:solidFill>
-                  <a:schemeClr val="tx1"/>
-                </a:solidFill>
-                <a:latin typeface="Times New Roman" panose="02020603050405020304" pitchFamily="18" charset="0"/>
-              </a:defRPr>
-            </a:lvl2pPr>
-            <a:lvl3pPr marL="1143000" indent="-228600">
-              <a:spcBef>
-                <a:spcPct val="20000"/>
-              </a:spcBef>
-              <a:buChar char="•"/>
-              <a:defRPr sz="2400">
-                <a:solidFill>
-                  <a:schemeClr val="tx1"/>
-                </a:solidFill>
-                <a:latin typeface="Times New Roman" panose="02020603050405020304" pitchFamily="18" charset="0"/>
-              </a:defRPr>
-            </a:lvl3pPr>
-            <a:lvl4pPr marL="1600200" indent="-228600">
-              <a:spcBef>
-                <a:spcPct val="20000"/>
-              </a:spcBef>
-              <a:buChar char="–"/>
-              <a:defRPr sz="2000">
-                <a:solidFill>
-                  <a:schemeClr val="tx1"/>
-                </a:solidFill>
-                <a:latin typeface="Times New Roman" panose="02020603050405020304" pitchFamily="18" charset="0"/>
-              </a:defRPr>
-            </a:lvl4pPr>
-            <a:lvl5pPr marL="2057400" indent="-228600">
-              <a:spcBef>
-                <a:spcPct val="20000"/>
-              </a:spcBef>
-              <a:buChar char="»"/>
-              <a:defRPr sz="2000">
-                <a:solidFill>
-                  <a:schemeClr val="tx1"/>
-                </a:solidFill>
-                <a:latin typeface="Times New Roman" panose="02020603050405020304" pitchFamily="18" charset="0"/>
-              </a:defRPr>
-            </a:lvl5pPr>
-            <a:lvl6pPr marL="2514600" indent="-228600" eaLnBrk="0" fontAlgn="base" hangingPunct="0">
-              <a:spcBef>
-                <a:spcPct val="20000"/>
-              </a:spcBef>
-              <a:spcAft>
-                <a:spcPct val="0"/>
-              </a:spcAft>
-              <a:buChar char="»"/>
-              <a:defRPr sz="2000">
-                <a:solidFill>
-                  <a:schemeClr val="tx1"/>
-                </a:solidFill>
-                <a:latin typeface="Times New Roman" panose="02020603050405020304" pitchFamily="18" charset="0"/>
-              </a:defRPr>
-            </a:lvl6pPr>
-            <a:lvl7pPr marL="2971800" indent="-228600" eaLnBrk="0" fontAlgn="base" hangingPunct="0">
-              <a:spcBef>
-                <a:spcPct val="20000"/>
-              </a:spcBef>
-              <a:spcAft>
-                <a:spcPct val="0"/>
-              </a:spcAft>
-              <a:buChar char="»"/>
-              <a:defRPr sz="2000">
-                <a:solidFill>
-                  <a:schemeClr val="tx1"/>
-                </a:solidFill>
-                <a:latin typeface="Times New Roman" panose="02020603050405020304" pitchFamily="18" charset="0"/>
-              </a:defRPr>
-            </a:lvl7pPr>
-            <a:lvl8pPr marL="3429000" indent="-228600" eaLnBrk="0" fontAlgn="base" hangingPunct="0">
-              <a:spcBef>
-                <a:spcPct val="20000"/>
-              </a:spcBef>
-              <a:spcAft>
-                <a:spcPct val="0"/>
-              </a:spcAft>
-              <a:buChar char="»"/>
-              <a:defRPr sz="2000">
-                <a:solidFill>
-                  <a:schemeClr val="tx1"/>
-                </a:solidFill>
-                <a:latin typeface="Times New Roman" panose="02020603050405020304" pitchFamily="18" charset="0"/>
-              </a:defRPr>
-            </a:lvl8pPr>
-            <a:lvl9pPr marL="3886200" indent="-228600" eaLnBrk="0" fontAlgn="base" hangingPunct="0">
-              <a:spcBef>
-                <a:spcPct val="20000"/>
-              </a:spcBef>
-              <a:spcAft>
-                <a:spcPct val="0"/>
-              </a:spcAft>
-              <a:buChar char="»"/>
-              <a:defRPr sz="2000">
-                <a:solidFill>
-                  <a:schemeClr val="tx1"/>
-                </a:solidFill>
-                <a:latin typeface="Times New Roman" panose="02020603050405020304" pitchFamily="18" charset="0"/>
-              </a:defRPr>
-            </a:lvl9pPr>
-          </a:lstStyle>
-          <a:p>
-            <a:pPr>
-              <a:spcBef>
-                <a:spcPct val="0"/>
-              </a:spcBef>
-              <a:buFontTx/>
-              <a:buNone/>
-            </a:pPr>
-            <a:endParaRPr lang="en-US" altLang="en-US" sz="2800" b="0">
-              <a:latin typeface="Tahoma" panose="020B0604030504040204" pitchFamily="34" charset="0"/>
-            </a:endParaRPr>
-          </a:p>
-        </p:txBody>
-      </p:sp>
-      <p:sp>
-        <p:nvSpPr>
           <p:cNvPr id="66565" name="Rectangle 4">
             <a:extLst>
               <a:ext uri="{FF2B5EF4-FFF2-40B4-BE49-F238E27FC236}">
@@ -20359,7 +20894,7 @@
             <a:r>
               <a:rPr lang="en-US" sz="2800" dirty="0">
                 <a:solidFill>
-                  <a:srgbClr val="7030A0"/>
+                  <a:srgbClr val="00B050"/>
                 </a:solidFill>
                 <a:latin typeface="Consolas" panose="020B0609020204030204" pitchFamily="49" charset="0"/>
               </a:rPr>
@@ -23880,6 +24415,933 @@
           </a:p>
         </p:txBody>
       </p:sp>
+      <p:grpSp>
+        <p:nvGrpSpPr>
+          <p:cNvPr id="8" name="Group 7">
+            <a:extLst>
+              <a:ext uri="{FF2B5EF4-FFF2-40B4-BE49-F238E27FC236}">
+                <a16:creationId xmlns:a16="http://schemas.microsoft.com/office/drawing/2014/main" id="{316387C4-D568-3B5D-CB2F-7820067FBB9F}"/>
+              </a:ext>
+            </a:extLst>
+          </p:cNvPr>
+          <p:cNvGrpSpPr/>
+          <p:nvPr/>
+        </p:nvGrpSpPr>
+        <p:grpSpPr>
+          <a:xfrm>
+            <a:off x="416168" y="2101360"/>
+            <a:ext cx="864339" cy="461665"/>
+            <a:chOff x="363416" y="1071878"/>
+            <a:chExt cx="864339" cy="461665"/>
+          </a:xfrm>
+        </p:grpSpPr>
+        <p:sp>
+          <p:nvSpPr>
+            <p:cNvPr id="5" name="Rectangle 4">
+              <a:extLst>
+                <a:ext uri="{FF2B5EF4-FFF2-40B4-BE49-F238E27FC236}">
+                  <a16:creationId xmlns:a16="http://schemas.microsoft.com/office/drawing/2014/main" id="{CEE0B96E-5A59-3CEB-95F4-2E6BDC9A1E87}"/>
+                </a:ext>
+              </a:extLst>
+            </p:cNvPr>
+            <p:cNvSpPr/>
+            <p:nvPr/>
+          </p:nvSpPr>
+          <p:spPr bwMode="auto">
+            <a:xfrm>
+              <a:off x="465992" y="1143000"/>
+              <a:ext cx="729762" cy="299709"/>
+            </a:xfrm>
+            <a:prstGeom prst="rect">
+              <a:avLst/>
+            </a:prstGeom>
+            <a:solidFill>
+              <a:schemeClr val="bg1"/>
+            </a:solidFill>
+            <a:ln w="9525" cap="flat" cmpd="sng" algn="ctr">
+              <a:solidFill>
+                <a:schemeClr val="bg1"/>
+              </a:solidFill>
+              <a:prstDash val="solid"/>
+              <a:round/>
+              <a:headEnd type="none" w="med" len="med"/>
+              <a:tailEnd type="none" w="med" len="med"/>
+            </a:ln>
+            <a:effectLst/>
+          </p:spPr>
+          <p:txBody>
+            <a:bodyPr vert="horz" wrap="square" lIns="91440" tIns="45720" rIns="91440" bIns="45720" numCol="1" rtlCol="0" anchor="t" anchorCtr="0" compatLnSpc="1">
+              <a:prstTxWarp prst="textNoShape">
+                <a:avLst/>
+              </a:prstTxWarp>
+            </a:bodyPr>
+            <a:lstStyle/>
+            <a:p>
+              <a:pPr marL="0" marR="0" indent="0" algn="ctr" defTabSz="914400" rtl="0" eaLnBrk="0" fontAlgn="base" latinLnBrk="0" hangingPunct="0">
+                <a:lnSpc>
+                  <a:spcPct val="100000"/>
+                </a:lnSpc>
+                <a:spcBef>
+                  <a:spcPct val="0"/>
+                </a:spcBef>
+                <a:spcAft>
+                  <a:spcPct val="0"/>
+                </a:spcAft>
+                <a:buClrTx/>
+                <a:buSzTx/>
+                <a:buFontTx/>
+                <a:buNone/>
+                <a:tabLst/>
+              </a:pPr>
+              <a:endParaRPr kumimoji="0" lang="en-US" sz="2800" b="1" i="0" u="none" strike="noStrike" cap="none" normalizeH="0" baseline="0">
+                <a:ln>
+                  <a:noFill/>
+                </a:ln>
+                <a:solidFill>
+                  <a:schemeClr val="tx1"/>
+                </a:solidFill>
+                <a:effectLst/>
+                <a:latin typeface="Tahoma" pitchFamily="34" charset="0"/>
+              </a:endParaRPr>
+            </a:p>
+          </p:txBody>
+        </p:sp>
+        <p:sp>
+          <p:nvSpPr>
+            <p:cNvPr id="7" name="TextBox 6">
+              <a:extLst>
+                <a:ext uri="{FF2B5EF4-FFF2-40B4-BE49-F238E27FC236}">
+                  <a16:creationId xmlns:a16="http://schemas.microsoft.com/office/drawing/2014/main" id="{66D00E9B-6A32-DFED-9F37-85214DB4B91B}"/>
+                </a:ext>
+              </a:extLst>
+            </p:cNvPr>
+            <p:cNvSpPr txBox="1"/>
+            <p:nvPr/>
+          </p:nvSpPr>
+          <p:spPr>
+            <a:xfrm>
+              <a:off x="363416" y="1071878"/>
+              <a:ext cx="864339" cy="461665"/>
+            </a:xfrm>
+            <a:prstGeom prst="rect">
+              <a:avLst/>
+            </a:prstGeom>
+            <a:noFill/>
+          </p:spPr>
+          <p:txBody>
+            <a:bodyPr wrap="none" rtlCol="0">
+              <a:spAutoFit/>
+            </a:bodyPr>
+            <a:lstStyle/>
+            <a:p>
+              <a:r>
+                <a:rPr lang="en-US" sz="2400" dirty="0">
+                  <a:latin typeface="Consolas" panose="020B0609020204030204" pitchFamily="49" charset="0"/>
+                </a:rPr>
+                <a:t>down</a:t>
+              </a:r>
+              <a:endParaRPr lang="en-US" dirty="0">
+                <a:latin typeface="Consolas" panose="020B0609020204030204" pitchFamily="49" charset="0"/>
+              </a:endParaRPr>
+            </a:p>
+          </p:txBody>
+        </p:sp>
+      </p:grpSp>
+      <p:grpSp>
+        <p:nvGrpSpPr>
+          <p:cNvPr id="9" name="Group 8">
+            <a:extLst>
+              <a:ext uri="{FF2B5EF4-FFF2-40B4-BE49-F238E27FC236}">
+                <a16:creationId xmlns:a16="http://schemas.microsoft.com/office/drawing/2014/main" id="{897D0466-5F37-277D-7900-E876AE29176B}"/>
+              </a:ext>
+            </a:extLst>
+          </p:cNvPr>
+          <p:cNvGrpSpPr/>
+          <p:nvPr/>
+        </p:nvGrpSpPr>
+        <p:grpSpPr>
+          <a:xfrm>
+            <a:off x="3212121" y="3020859"/>
+            <a:ext cx="864339" cy="461665"/>
+            <a:chOff x="363416" y="1071878"/>
+            <a:chExt cx="864339" cy="461665"/>
+          </a:xfrm>
+        </p:grpSpPr>
+        <p:sp>
+          <p:nvSpPr>
+            <p:cNvPr id="10" name="Rectangle 9">
+              <a:extLst>
+                <a:ext uri="{FF2B5EF4-FFF2-40B4-BE49-F238E27FC236}">
+                  <a16:creationId xmlns:a16="http://schemas.microsoft.com/office/drawing/2014/main" id="{29E97359-EB18-841A-BD14-28A0B7D8F3F1}"/>
+                </a:ext>
+              </a:extLst>
+            </p:cNvPr>
+            <p:cNvSpPr/>
+            <p:nvPr/>
+          </p:nvSpPr>
+          <p:spPr bwMode="auto">
+            <a:xfrm>
+              <a:off x="465992" y="1143000"/>
+              <a:ext cx="729762" cy="299709"/>
+            </a:xfrm>
+            <a:prstGeom prst="rect">
+              <a:avLst/>
+            </a:prstGeom>
+            <a:solidFill>
+              <a:schemeClr val="bg1"/>
+            </a:solidFill>
+            <a:ln w="9525" cap="flat" cmpd="sng" algn="ctr">
+              <a:solidFill>
+                <a:schemeClr val="bg1"/>
+              </a:solidFill>
+              <a:prstDash val="solid"/>
+              <a:round/>
+              <a:headEnd type="none" w="med" len="med"/>
+              <a:tailEnd type="none" w="med" len="med"/>
+            </a:ln>
+            <a:effectLst/>
+          </p:spPr>
+          <p:txBody>
+            <a:bodyPr vert="horz" wrap="square" lIns="91440" tIns="45720" rIns="91440" bIns="45720" numCol="1" rtlCol="0" anchor="t" anchorCtr="0" compatLnSpc="1">
+              <a:prstTxWarp prst="textNoShape">
+                <a:avLst/>
+              </a:prstTxWarp>
+            </a:bodyPr>
+            <a:lstStyle/>
+            <a:p>
+              <a:pPr marL="0" marR="0" indent="0" algn="ctr" defTabSz="914400" rtl="0" eaLnBrk="0" fontAlgn="base" latinLnBrk="0" hangingPunct="0">
+                <a:lnSpc>
+                  <a:spcPct val="100000"/>
+                </a:lnSpc>
+                <a:spcBef>
+                  <a:spcPct val="0"/>
+                </a:spcBef>
+                <a:spcAft>
+                  <a:spcPct val="0"/>
+                </a:spcAft>
+                <a:buClrTx/>
+                <a:buSzTx/>
+                <a:buFontTx/>
+                <a:buNone/>
+                <a:tabLst/>
+              </a:pPr>
+              <a:endParaRPr kumimoji="0" lang="en-US" sz="2800" b="1" i="0" u="none" strike="noStrike" cap="none" normalizeH="0" baseline="0">
+                <a:ln>
+                  <a:noFill/>
+                </a:ln>
+                <a:solidFill>
+                  <a:schemeClr val="tx1"/>
+                </a:solidFill>
+                <a:effectLst/>
+                <a:latin typeface="Tahoma" pitchFamily="34" charset="0"/>
+              </a:endParaRPr>
+            </a:p>
+          </p:txBody>
+        </p:sp>
+        <p:sp>
+          <p:nvSpPr>
+            <p:cNvPr id="11" name="TextBox 10">
+              <a:extLst>
+                <a:ext uri="{FF2B5EF4-FFF2-40B4-BE49-F238E27FC236}">
+                  <a16:creationId xmlns:a16="http://schemas.microsoft.com/office/drawing/2014/main" id="{118ABED3-C3B0-3EC1-E863-D005055ADB33}"/>
+                </a:ext>
+              </a:extLst>
+            </p:cNvPr>
+            <p:cNvSpPr txBox="1"/>
+            <p:nvPr/>
+          </p:nvSpPr>
+          <p:spPr>
+            <a:xfrm>
+              <a:off x="363416" y="1071878"/>
+              <a:ext cx="864339" cy="461665"/>
+            </a:xfrm>
+            <a:prstGeom prst="rect">
+              <a:avLst/>
+            </a:prstGeom>
+            <a:noFill/>
+          </p:spPr>
+          <p:txBody>
+            <a:bodyPr wrap="none" rtlCol="0">
+              <a:spAutoFit/>
+            </a:bodyPr>
+            <a:lstStyle/>
+            <a:p>
+              <a:r>
+                <a:rPr lang="en-US" sz="2400" dirty="0">
+                  <a:latin typeface="Consolas" panose="020B0609020204030204" pitchFamily="49" charset="0"/>
+                </a:rPr>
+                <a:t>down</a:t>
+              </a:r>
+              <a:endParaRPr lang="en-US" dirty="0">
+                <a:latin typeface="Consolas" panose="020B0609020204030204" pitchFamily="49" charset="0"/>
+              </a:endParaRPr>
+            </a:p>
+          </p:txBody>
+        </p:sp>
+      </p:grpSp>
+      <p:grpSp>
+        <p:nvGrpSpPr>
+          <p:cNvPr id="12" name="Group 11">
+            <a:extLst>
+              <a:ext uri="{FF2B5EF4-FFF2-40B4-BE49-F238E27FC236}">
+                <a16:creationId xmlns:a16="http://schemas.microsoft.com/office/drawing/2014/main" id="{67550DA4-C995-7981-049A-D25FD254E85B}"/>
+              </a:ext>
+            </a:extLst>
+          </p:cNvPr>
+          <p:cNvGrpSpPr/>
+          <p:nvPr/>
+        </p:nvGrpSpPr>
+        <p:grpSpPr>
+          <a:xfrm>
+            <a:off x="4139830" y="3823889"/>
+            <a:ext cx="864339" cy="461665"/>
+            <a:chOff x="363416" y="1071878"/>
+            <a:chExt cx="864339" cy="461665"/>
+          </a:xfrm>
+        </p:grpSpPr>
+        <p:sp>
+          <p:nvSpPr>
+            <p:cNvPr id="13" name="Rectangle 12">
+              <a:extLst>
+                <a:ext uri="{FF2B5EF4-FFF2-40B4-BE49-F238E27FC236}">
+                  <a16:creationId xmlns:a16="http://schemas.microsoft.com/office/drawing/2014/main" id="{67AADBFE-4056-C050-AD87-3CDA040DFB41}"/>
+                </a:ext>
+              </a:extLst>
+            </p:cNvPr>
+            <p:cNvSpPr/>
+            <p:nvPr/>
+          </p:nvSpPr>
+          <p:spPr bwMode="auto">
+            <a:xfrm>
+              <a:off x="465992" y="1143000"/>
+              <a:ext cx="729762" cy="299709"/>
+            </a:xfrm>
+            <a:prstGeom prst="rect">
+              <a:avLst/>
+            </a:prstGeom>
+            <a:solidFill>
+              <a:schemeClr val="bg1"/>
+            </a:solidFill>
+            <a:ln w="9525" cap="flat" cmpd="sng" algn="ctr">
+              <a:solidFill>
+                <a:schemeClr val="bg1"/>
+              </a:solidFill>
+              <a:prstDash val="solid"/>
+              <a:round/>
+              <a:headEnd type="none" w="med" len="med"/>
+              <a:tailEnd type="none" w="med" len="med"/>
+            </a:ln>
+            <a:effectLst/>
+          </p:spPr>
+          <p:txBody>
+            <a:bodyPr vert="horz" wrap="square" lIns="91440" tIns="45720" rIns="91440" bIns="45720" numCol="1" rtlCol="0" anchor="t" anchorCtr="0" compatLnSpc="1">
+              <a:prstTxWarp prst="textNoShape">
+                <a:avLst/>
+              </a:prstTxWarp>
+            </a:bodyPr>
+            <a:lstStyle/>
+            <a:p>
+              <a:pPr marL="0" marR="0" indent="0" algn="ctr" defTabSz="914400" rtl="0" eaLnBrk="0" fontAlgn="base" latinLnBrk="0" hangingPunct="0">
+                <a:lnSpc>
+                  <a:spcPct val="100000"/>
+                </a:lnSpc>
+                <a:spcBef>
+                  <a:spcPct val="0"/>
+                </a:spcBef>
+                <a:spcAft>
+                  <a:spcPct val="0"/>
+                </a:spcAft>
+                <a:buClrTx/>
+                <a:buSzTx/>
+                <a:buFontTx/>
+                <a:buNone/>
+                <a:tabLst/>
+              </a:pPr>
+              <a:endParaRPr kumimoji="0" lang="en-US" sz="2800" b="1" i="0" u="none" strike="noStrike" cap="none" normalizeH="0" baseline="0">
+                <a:ln>
+                  <a:noFill/>
+                </a:ln>
+                <a:solidFill>
+                  <a:schemeClr val="tx1"/>
+                </a:solidFill>
+                <a:effectLst/>
+                <a:latin typeface="Tahoma" pitchFamily="34" charset="0"/>
+              </a:endParaRPr>
+            </a:p>
+          </p:txBody>
+        </p:sp>
+        <p:sp>
+          <p:nvSpPr>
+            <p:cNvPr id="14" name="TextBox 13">
+              <a:extLst>
+                <a:ext uri="{FF2B5EF4-FFF2-40B4-BE49-F238E27FC236}">
+                  <a16:creationId xmlns:a16="http://schemas.microsoft.com/office/drawing/2014/main" id="{96C9BCD9-C5C3-E304-0D08-0B8945880CD6}"/>
+                </a:ext>
+              </a:extLst>
+            </p:cNvPr>
+            <p:cNvSpPr txBox="1"/>
+            <p:nvPr/>
+          </p:nvSpPr>
+          <p:spPr>
+            <a:xfrm>
+              <a:off x="363416" y="1071878"/>
+              <a:ext cx="864339" cy="461665"/>
+            </a:xfrm>
+            <a:prstGeom prst="rect">
+              <a:avLst/>
+            </a:prstGeom>
+            <a:noFill/>
+          </p:spPr>
+          <p:txBody>
+            <a:bodyPr wrap="none" rtlCol="0">
+              <a:spAutoFit/>
+            </a:bodyPr>
+            <a:lstStyle/>
+            <a:p>
+              <a:r>
+                <a:rPr lang="en-US" sz="2400" dirty="0">
+                  <a:latin typeface="Consolas" panose="020B0609020204030204" pitchFamily="49" charset="0"/>
+                </a:rPr>
+                <a:t>down</a:t>
+              </a:r>
+              <a:endParaRPr lang="en-US" dirty="0">
+                <a:latin typeface="Consolas" panose="020B0609020204030204" pitchFamily="49" charset="0"/>
+              </a:endParaRPr>
+            </a:p>
+          </p:txBody>
+        </p:sp>
+      </p:grpSp>
+      <p:grpSp>
+        <p:nvGrpSpPr>
+          <p:cNvPr id="15" name="Group 14">
+            <a:extLst>
+              <a:ext uri="{FF2B5EF4-FFF2-40B4-BE49-F238E27FC236}">
+                <a16:creationId xmlns:a16="http://schemas.microsoft.com/office/drawing/2014/main" id="{E2A99E27-3132-88A6-0FC2-ECB8A168B12C}"/>
+              </a:ext>
+            </a:extLst>
+          </p:cNvPr>
+          <p:cNvGrpSpPr/>
+          <p:nvPr/>
+        </p:nvGrpSpPr>
+        <p:grpSpPr>
+          <a:xfrm>
+            <a:off x="5067539" y="4653295"/>
+            <a:ext cx="864339" cy="461665"/>
+            <a:chOff x="363416" y="1071878"/>
+            <a:chExt cx="864339" cy="461665"/>
+          </a:xfrm>
+        </p:grpSpPr>
+        <p:sp>
+          <p:nvSpPr>
+            <p:cNvPr id="16" name="Rectangle 15">
+              <a:extLst>
+                <a:ext uri="{FF2B5EF4-FFF2-40B4-BE49-F238E27FC236}">
+                  <a16:creationId xmlns:a16="http://schemas.microsoft.com/office/drawing/2014/main" id="{9D55E8AF-965E-B128-6F27-AB3A17C98E51}"/>
+                </a:ext>
+              </a:extLst>
+            </p:cNvPr>
+            <p:cNvSpPr/>
+            <p:nvPr/>
+          </p:nvSpPr>
+          <p:spPr bwMode="auto">
+            <a:xfrm>
+              <a:off x="465992" y="1143000"/>
+              <a:ext cx="729762" cy="299709"/>
+            </a:xfrm>
+            <a:prstGeom prst="rect">
+              <a:avLst/>
+            </a:prstGeom>
+            <a:solidFill>
+              <a:schemeClr val="bg1"/>
+            </a:solidFill>
+            <a:ln w="9525" cap="flat" cmpd="sng" algn="ctr">
+              <a:solidFill>
+                <a:schemeClr val="bg1"/>
+              </a:solidFill>
+              <a:prstDash val="solid"/>
+              <a:round/>
+              <a:headEnd type="none" w="med" len="med"/>
+              <a:tailEnd type="none" w="med" len="med"/>
+            </a:ln>
+            <a:effectLst/>
+          </p:spPr>
+          <p:txBody>
+            <a:bodyPr vert="horz" wrap="square" lIns="91440" tIns="45720" rIns="91440" bIns="45720" numCol="1" rtlCol="0" anchor="t" anchorCtr="0" compatLnSpc="1">
+              <a:prstTxWarp prst="textNoShape">
+                <a:avLst/>
+              </a:prstTxWarp>
+            </a:bodyPr>
+            <a:lstStyle/>
+            <a:p>
+              <a:pPr marL="0" marR="0" indent="0" algn="ctr" defTabSz="914400" rtl="0" eaLnBrk="0" fontAlgn="base" latinLnBrk="0" hangingPunct="0">
+                <a:lnSpc>
+                  <a:spcPct val="100000"/>
+                </a:lnSpc>
+                <a:spcBef>
+                  <a:spcPct val="0"/>
+                </a:spcBef>
+                <a:spcAft>
+                  <a:spcPct val="0"/>
+                </a:spcAft>
+                <a:buClrTx/>
+                <a:buSzTx/>
+                <a:buFontTx/>
+                <a:buNone/>
+                <a:tabLst/>
+              </a:pPr>
+              <a:endParaRPr kumimoji="0" lang="en-US" sz="2800" b="1" i="0" u="none" strike="noStrike" cap="none" normalizeH="0" baseline="0">
+                <a:ln>
+                  <a:noFill/>
+                </a:ln>
+                <a:solidFill>
+                  <a:schemeClr val="tx1"/>
+                </a:solidFill>
+                <a:effectLst/>
+                <a:latin typeface="Tahoma" pitchFamily="34" charset="0"/>
+              </a:endParaRPr>
+            </a:p>
+          </p:txBody>
+        </p:sp>
+        <p:sp>
+          <p:nvSpPr>
+            <p:cNvPr id="17" name="TextBox 16">
+              <a:extLst>
+                <a:ext uri="{FF2B5EF4-FFF2-40B4-BE49-F238E27FC236}">
+                  <a16:creationId xmlns:a16="http://schemas.microsoft.com/office/drawing/2014/main" id="{B55823D7-3C4D-EB78-A8C9-B187DF1614A0}"/>
+                </a:ext>
+              </a:extLst>
+            </p:cNvPr>
+            <p:cNvSpPr txBox="1"/>
+            <p:nvPr/>
+          </p:nvSpPr>
+          <p:spPr>
+            <a:xfrm>
+              <a:off x="363416" y="1071878"/>
+              <a:ext cx="864339" cy="461665"/>
+            </a:xfrm>
+            <a:prstGeom prst="rect">
+              <a:avLst/>
+            </a:prstGeom>
+            <a:noFill/>
+          </p:spPr>
+          <p:txBody>
+            <a:bodyPr wrap="none" rtlCol="0">
+              <a:spAutoFit/>
+            </a:bodyPr>
+            <a:lstStyle/>
+            <a:p>
+              <a:r>
+                <a:rPr lang="en-US" sz="2400" dirty="0">
+                  <a:latin typeface="Consolas" panose="020B0609020204030204" pitchFamily="49" charset="0"/>
+                </a:rPr>
+                <a:t>down</a:t>
+              </a:r>
+              <a:endParaRPr lang="en-US" dirty="0">
+                <a:latin typeface="Consolas" panose="020B0609020204030204" pitchFamily="49" charset="0"/>
+              </a:endParaRPr>
+            </a:p>
+          </p:txBody>
+        </p:sp>
+      </p:grpSp>
+      <p:grpSp>
+        <p:nvGrpSpPr>
+          <p:cNvPr id="18" name="Group 17">
+            <a:extLst>
+              <a:ext uri="{FF2B5EF4-FFF2-40B4-BE49-F238E27FC236}">
+                <a16:creationId xmlns:a16="http://schemas.microsoft.com/office/drawing/2014/main" id="{E6B08E5C-062B-FAAD-1FC2-7A99B2000369}"/>
+              </a:ext>
+            </a:extLst>
+          </p:cNvPr>
+          <p:cNvGrpSpPr/>
+          <p:nvPr/>
+        </p:nvGrpSpPr>
+        <p:grpSpPr>
+          <a:xfrm>
+            <a:off x="5170115" y="3815096"/>
+            <a:ext cx="832338" cy="461665"/>
+            <a:chOff x="363416" y="1071878"/>
+            <a:chExt cx="832338" cy="461665"/>
+          </a:xfrm>
+        </p:grpSpPr>
+        <p:sp>
+          <p:nvSpPr>
+            <p:cNvPr id="19" name="Rectangle 18">
+              <a:extLst>
+                <a:ext uri="{FF2B5EF4-FFF2-40B4-BE49-F238E27FC236}">
+                  <a16:creationId xmlns:a16="http://schemas.microsoft.com/office/drawing/2014/main" id="{1944520F-BB99-00FA-0723-70C1C50D874D}"/>
+                </a:ext>
+              </a:extLst>
+            </p:cNvPr>
+            <p:cNvSpPr/>
+            <p:nvPr/>
+          </p:nvSpPr>
+          <p:spPr bwMode="auto">
+            <a:xfrm>
+              <a:off x="465992" y="1143000"/>
+              <a:ext cx="729762" cy="299709"/>
+            </a:xfrm>
+            <a:prstGeom prst="rect">
+              <a:avLst/>
+            </a:prstGeom>
+            <a:solidFill>
+              <a:schemeClr val="bg1"/>
+            </a:solidFill>
+            <a:ln w="9525" cap="flat" cmpd="sng" algn="ctr">
+              <a:solidFill>
+                <a:schemeClr val="bg1"/>
+              </a:solidFill>
+              <a:prstDash val="solid"/>
+              <a:round/>
+              <a:headEnd type="none" w="med" len="med"/>
+              <a:tailEnd type="none" w="med" len="med"/>
+            </a:ln>
+            <a:effectLst/>
+          </p:spPr>
+          <p:txBody>
+            <a:bodyPr vert="horz" wrap="square" lIns="91440" tIns="45720" rIns="91440" bIns="45720" numCol="1" rtlCol="0" anchor="t" anchorCtr="0" compatLnSpc="1">
+              <a:prstTxWarp prst="textNoShape">
+                <a:avLst/>
+              </a:prstTxWarp>
+            </a:bodyPr>
+            <a:lstStyle/>
+            <a:p>
+              <a:pPr marL="0" marR="0" indent="0" algn="ctr" defTabSz="914400" rtl="0" eaLnBrk="0" fontAlgn="base" latinLnBrk="0" hangingPunct="0">
+                <a:lnSpc>
+                  <a:spcPct val="100000"/>
+                </a:lnSpc>
+                <a:spcBef>
+                  <a:spcPct val="0"/>
+                </a:spcBef>
+                <a:spcAft>
+                  <a:spcPct val="0"/>
+                </a:spcAft>
+                <a:buClrTx/>
+                <a:buSzTx/>
+                <a:buFontTx/>
+                <a:buNone/>
+                <a:tabLst/>
+              </a:pPr>
+              <a:endParaRPr kumimoji="0" lang="en-US" sz="2800" b="1" i="0" u="none" strike="noStrike" cap="none" normalizeH="0" baseline="0">
+                <a:ln>
+                  <a:noFill/>
+                </a:ln>
+                <a:solidFill>
+                  <a:schemeClr val="tx1"/>
+                </a:solidFill>
+                <a:effectLst/>
+                <a:latin typeface="Tahoma" pitchFamily="34" charset="0"/>
+              </a:endParaRPr>
+            </a:p>
+          </p:txBody>
+        </p:sp>
+        <p:sp>
+          <p:nvSpPr>
+            <p:cNvPr id="20" name="TextBox 19">
+              <a:extLst>
+                <a:ext uri="{FF2B5EF4-FFF2-40B4-BE49-F238E27FC236}">
+                  <a16:creationId xmlns:a16="http://schemas.microsoft.com/office/drawing/2014/main" id="{4905F1AB-39E9-FC08-93EE-EF914A4186D2}"/>
+                </a:ext>
+              </a:extLst>
+            </p:cNvPr>
+            <p:cNvSpPr txBox="1"/>
+            <p:nvPr/>
+          </p:nvSpPr>
+          <p:spPr>
+            <a:xfrm>
+              <a:off x="363416" y="1071878"/>
+              <a:ext cx="729762" cy="461665"/>
+            </a:xfrm>
+            <a:prstGeom prst="rect">
+              <a:avLst/>
+            </a:prstGeom>
+            <a:noFill/>
+          </p:spPr>
+          <p:txBody>
+            <a:bodyPr wrap="square" rtlCol="0">
+              <a:spAutoFit/>
+            </a:bodyPr>
+            <a:lstStyle/>
+            <a:p>
+              <a:pPr algn="ctr"/>
+              <a:r>
+                <a:rPr lang="en-US" sz="2400" dirty="0">
+                  <a:latin typeface="Consolas" panose="020B0609020204030204" pitchFamily="49" charset="0"/>
+                </a:rPr>
+                <a:t>up</a:t>
+              </a:r>
+              <a:endParaRPr lang="en-US" dirty="0">
+                <a:latin typeface="Consolas" panose="020B0609020204030204" pitchFamily="49" charset="0"/>
+              </a:endParaRPr>
+            </a:p>
+          </p:txBody>
+        </p:sp>
+      </p:grpSp>
+      <p:grpSp>
+        <p:nvGrpSpPr>
+          <p:cNvPr id="21" name="Group 20">
+            <a:extLst>
+              <a:ext uri="{FF2B5EF4-FFF2-40B4-BE49-F238E27FC236}">
+                <a16:creationId xmlns:a16="http://schemas.microsoft.com/office/drawing/2014/main" id="{CE7BDDC0-34E7-377D-DC1C-539A3B82FA51}"/>
+              </a:ext>
+            </a:extLst>
+          </p:cNvPr>
+          <p:cNvGrpSpPr/>
+          <p:nvPr/>
+        </p:nvGrpSpPr>
+        <p:grpSpPr>
+          <a:xfrm>
+            <a:off x="7045807" y="3019794"/>
+            <a:ext cx="832338" cy="461665"/>
+            <a:chOff x="363416" y="1071878"/>
+            <a:chExt cx="832338" cy="461665"/>
+          </a:xfrm>
+        </p:grpSpPr>
+        <p:sp>
+          <p:nvSpPr>
+            <p:cNvPr id="22" name="Rectangle 21">
+              <a:extLst>
+                <a:ext uri="{FF2B5EF4-FFF2-40B4-BE49-F238E27FC236}">
+                  <a16:creationId xmlns:a16="http://schemas.microsoft.com/office/drawing/2014/main" id="{FD97DA3B-073C-1884-142F-3EFB3008671E}"/>
+                </a:ext>
+              </a:extLst>
+            </p:cNvPr>
+            <p:cNvSpPr/>
+            <p:nvPr/>
+          </p:nvSpPr>
+          <p:spPr bwMode="auto">
+            <a:xfrm>
+              <a:off x="465992" y="1143000"/>
+              <a:ext cx="729762" cy="299709"/>
+            </a:xfrm>
+            <a:prstGeom prst="rect">
+              <a:avLst/>
+            </a:prstGeom>
+            <a:solidFill>
+              <a:schemeClr val="bg1"/>
+            </a:solidFill>
+            <a:ln w="9525" cap="flat" cmpd="sng" algn="ctr">
+              <a:solidFill>
+                <a:schemeClr val="bg1"/>
+              </a:solidFill>
+              <a:prstDash val="solid"/>
+              <a:round/>
+              <a:headEnd type="none" w="med" len="med"/>
+              <a:tailEnd type="none" w="med" len="med"/>
+            </a:ln>
+            <a:effectLst/>
+          </p:spPr>
+          <p:txBody>
+            <a:bodyPr vert="horz" wrap="square" lIns="91440" tIns="45720" rIns="91440" bIns="45720" numCol="1" rtlCol="0" anchor="t" anchorCtr="0" compatLnSpc="1">
+              <a:prstTxWarp prst="textNoShape">
+                <a:avLst/>
+              </a:prstTxWarp>
+            </a:bodyPr>
+            <a:lstStyle/>
+            <a:p>
+              <a:pPr marL="0" marR="0" indent="0" algn="ctr" defTabSz="914400" rtl="0" eaLnBrk="0" fontAlgn="base" latinLnBrk="0" hangingPunct="0">
+                <a:lnSpc>
+                  <a:spcPct val="100000"/>
+                </a:lnSpc>
+                <a:spcBef>
+                  <a:spcPct val="0"/>
+                </a:spcBef>
+                <a:spcAft>
+                  <a:spcPct val="0"/>
+                </a:spcAft>
+                <a:buClrTx/>
+                <a:buSzTx/>
+                <a:buFontTx/>
+                <a:buNone/>
+                <a:tabLst/>
+              </a:pPr>
+              <a:endParaRPr kumimoji="0" lang="en-US" sz="2800" b="1" i="0" u="none" strike="noStrike" cap="none" normalizeH="0" baseline="0">
+                <a:ln>
+                  <a:noFill/>
+                </a:ln>
+                <a:solidFill>
+                  <a:schemeClr val="tx1"/>
+                </a:solidFill>
+                <a:effectLst/>
+                <a:latin typeface="Tahoma" pitchFamily="34" charset="0"/>
+              </a:endParaRPr>
+            </a:p>
+          </p:txBody>
+        </p:sp>
+        <p:sp>
+          <p:nvSpPr>
+            <p:cNvPr id="23" name="TextBox 22">
+              <a:extLst>
+                <a:ext uri="{FF2B5EF4-FFF2-40B4-BE49-F238E27FC236}">
+                  <a16:creationId xmlns:a16="http://schemas.microsoft.com/office/drawing/2014/main" id="{9C3CE930-2794-AA3B-2A91-FAB5CF88AE73}"/>
+                </a:ext>
+              </a:extLst>
+            </p:cNvPr>
+            <p:cNvSpPr txBox="1"/>
+            <p:nvPr/>
+          </p:nvSpPr>
+          <p:spPr>
+            <a:xfrm>
+              <a:off x="363416" y="1071878"/>
+              <a:ext cx="729762" cy="461665"/>
+            </a:xfrm>
+            <a:prstGeom prst="rect">
+              <a:avLst/>
+            </a:prstGeom>
+            <a:noFill/>
+          </p:spPr>
+          <p:txBody>
+            <a:bodyPr wrap="square" rtlCol="0">
+              <a:spAutoFit/>
+            </a:bodyPr>
+            <a:lstStyle/>
+            <a:p>
+              <a:pPr algn="ctr"/>
+              <a:r>
+                <a:rPr lang="en-US" sz="2400" dirty="0">
+                  <a:latin typeface="Consolas" panose="020B0609020204030204" pitchFamily="49" charset="0"/>
+                </a:rPr>
+                <a:t>up</a:t>
+              </a:r>
+              <a:endParaRPr lang="en-US" dirty="0">
+                <a:latin typeface="Consolas" panose="020B0609020204030204" pitchFamily="49" charset="0"/>
+              </a:endParaRPr>
+            </a:p>
+          </p:txBody>
+        </p:sp>
+      </p:grpSp>
+      <p:grpSp>
+        <p:nvGrpSpPr>
+          <p:cNvPr id="24" name="Group 23">
+            <a:extLst>
+              <a:ext uri="{FF2B5EF4-FFF2-40B4-BE49-F238E27FC236}">
+                <a16:creationId xmlns:a16="http://schemas.microsoft.com/office/drawing/2014/main" id="{0069C86C-9326-30AD-0A38-742E983596C3}"/>
+              </a:ext>
+            </a:extLst>
+          </p:cNvPr>
+          <p:cNvGrpSpPr/>
+          <p:nvPr/>
+        </p:nvGrpSpPr>
+        <p:grpSpPr>
+          <a:xfrm>
+            <a:off x="8025548" y="2163690"/>
+            <a:ext cx="832338" cy="461665"/>
+            <a:chOff x="363416" y="1071878"/>
+            <a:chExt cx="832338" cy="461665"/>
+          </a:xfrm>
+        </p:grpSpPr>
+        <p:sp>
+          <p:nvSpPr>
+            <p:cNvPr id="25" name="Rectangle 24">
+              <a:extLst>
+                <a:ext uri="{FF2B5EF4-FFF2-40B4-BE49-F238E27FC236}">
+                  <a16:creationId xmlns:a16="http://schemas.microsoft.com/office/drawing/2014/main" id="{64C100C4-EBD5-3342-110F-5E12C6F590FD}"/>
+                </a:ext>
+              </a:extLst>
+            </p:cNvPr>
+            <p:cNvSpPr/>
+            <p:nvPr/>
+          </p:nvSpPr>
+          <p:spPr bwMode="auto">
+            <a:xfrm>
+              <a:off x="465992" y="1143000"/>
+              <a:ext cx="729762" cy="299709"/>
+            </a:xfrm>
+            <a:prstGeom prst="rect">
+              <a:avLst/>
+            </a:prstGeom>
+            <a:solidFill>
+              <a:schemeClr val="bg1"/>
+            </a:solidFill>
+            <a:ln w="9525" cap="flat" cmpd="sng" algn="ctr">
+              <a:solidFill>
+                <a:schemeClr val="bg1"/>
+              </a:solidFill>
+              <a:prstDash val="solid"/>
+              <a:round/>
+              <a:headEnd type="none" w="med" len="med"/>
+              <a:tailEnd type="none" w="med" len="med"/>
+            </a:ln>
+            <a:effectLst/>
+          </p:spPr>
+          <p:txBody>
+            <a:bodyPr vert="horz" wrap="square" lIns="91440" tIns="45720" rIns="91440" bIns="45720" numCol="1" rtlCol="0" anchor="t" anchorCtr="0" compatLnSpc="1">
+              <a:prstTxWarp prst="textNoShape">
+                <a:avLst/>
+              </a:prstTxWarp>
+            </a:bodyPr>
+            <a:lstStyle/>
+            <a:p>
+              <a:pPr marL="0" marR="0" indent="0" algn="ctr" defTabSz="914400" rtl="0" eaLnBrk="0" fontAlgn="base" latinLnBrk="0" hangingPunct="0">
+                <a:lnSpc>
+                  <a:spcPct val="100000"/>
+                </a:lnSpc>
+                <a:spcBef>
+                  <a:spcPct val="0"/>
+                </a:spcBef>
+                <a:spcAft>
+                  <a:spcPct val="0"/>
+                </a:spcAft>
+                <a:buClrTx/>
+                <a:buSzTx/>
+                <a:buFontTx/>
+                <a:buNone/>
+                <a:tabLst/>
+              </a:pPr>
+              <a:endParaRPr kumimoji="0" lang="en-US" sz="2800" b="1" i="0" u="none" strike="noStrike" cap="none" normalizeH="0" baseline="0">
+                <a:ln>
+                  <a:noFill/>
+                </a:ln>
+                <a:solidFill>
+                  <a:schemeClr val="tx1"/>
+                </a:solidFill>
+                <a:effectLst/>
+                <a:latin typeface="Tahoma" pitchFamily="34" charset="0"/>
+              </a:endParaRPr>
+            </a:p>
+          </p:txBody>
+        </p:sp>
+        <p:sp>
+          <p:nvSpPr>
+            <p:cNvPr id="26" name="TextBox 25">
+              <a:extLst>
+                <a:ext uri="{FF2B5EF4-FFF2-40B4-BE49-F238E27FC236}">
+                  <a16:creationId xmlns:a16="http://schemas.microsoft.com/office/drawing/2014/main" id="{5449717E-6611-B697-C3E6-33C695E89D66}"/>
+                </a:ext>
+              </a:extLst>
+            </p:cNvPr>
+            <p:cNvSpPr txBox="1"/>
+            <p:nvPr/>
+          </p:nvSpPr>
+          <p:spPr>
+            <a:xfrm>
+              <a:off x="363416" y="1071878"/>
+              <a:ext cx="729762" cy="461665"/>
+            </a:xfrm>
+            <a:prstGeom prst="rect">
+              <a:avLst/>
+            </a:prstGeom>
+            <a:noFill/>
+          </p:spPr>
+          <p:txBody>
+            <a:bodyPr wrap="square" rtlCol="0">
+              <a:spAutoFit/>
+            </a:bodyPr>
+            <a:lstStyle/>
+            <a:p>
+              <a:pPr algn="ctr"/>
+              <a:r>
+                <a:rPr lang="en-US" sz="2400" dirty="0">
+                  <a:latin typeface="Consolas" panose="020B0609020204030204" pitchFamily="49" charset="0"/>
+                </a:rPr>
+                <a:t>up</a:t>
+              </a:r>
+              <a:endParaRPr lang="en-US" dirty="0">
+                <a:latin typeface="Consolas" panose="020B0609020204030204" pitchFamily="49" charset="0"/>
+              </a:endParaRPr>
+            </a:p>
+          </p:txBody>
+        </p:sp>
+      </p:grpSp>
     </p:spTree>
   </p:cSld>
   <p:clrMapOvr>
@@ -24168,19 +25630,7 @@
               <a:rPr lang="en-US" altLang="en-US" sz="2800" b="0" dirty="0">
                 <a:latin typeface="Tahoma" panose="020B0604030504040204" pitchFamily="34" charset="0"/>
               </a:rPr>
-              <a:t>void </a:t>
-            </a:r>
-            <a:r>
-              <a:rPr lang="en-US" altLang="en-US" sz="2800" b="0" dirty="0" err="1">
-                <a:latin typeface="Tahoma" panose="020B0604030504040204" pitchFamily="34" charset="0"/>
-              </a:rPr>
-              <a:t>quickSort</a:t>
-            </a:r>
-            <a:r>
-              <a:rPr lang="en-US" altLang="en-US" sz="2800" b="0" dirty="0">
-                <a:latin typeface="Tahoma" panose="020B0604030504040204" pitchFamily="34" charset="0"/>
-              </a:rPr>
-              <a:t>(int[] stuff, int low, int high) {</a:t>
+              <a:t>void sort(int[] stuff, int start, int end) {</a:t>
             </a:r>
           </a:p>
           <a:p>
@@ -24195,7 +25645,7 @@
               <a:rPr lang="en-US" altLang="en-US" sz="2800" b="0" dirty="0">
                 <a:latin typeface="Tahoma" panose="020B0604030504040204" pitchFamily="34" charset="0"/>
               </a:rPr>
-              <a:t>  if (low &lt; high)</a:t>
+              <a:t>  if (start &lt; end)</a:t>
             </a:r>
           </a:p>
           <a:p>
@@ -24225,7 +25675,7 @@
               <a:rPr lang="en-US" altLang="en-US" sz="2800" b="0" dirty="0">
                 <a:latin typeface="Tahoma" panose="020B0604030504040204" pitchFamily="34" charset="0"/>
               </a:rPr>
-              <a:t>    int spot = partition(stuff, low, high);</a:t>
+              <a:t>    int spot = partition(stuff, start, end);</a:t>
             </a:r>
           </a:p>
           <a:p>
@@ -24252,7 +25702,7 @@
               <a:rPr lang="en-US" altLang="en-US" sz="2800" b="0" dirty="0">
                 <a:latin typeface="Tahoma" panose="020B0604030504040204" pitchFamily="34" charset="0"/>
               </a:rPr>
-              <a:t>(stuff, low, spot - 1);</a:t>
+              <a:t>(stuff, start, spot - 1);</a:t>
             </a:r>
           </a:p>
           <a:p>
@@ -24279,7 +25729,7 @@
               <a:rPr lang="en-US" altLang="en-US" sz="2800" b="0" dirty="0">
                 <a:latin typeface="Tahoma" panose="020B0604030504040204" pitchFamily="34" charset="0"/>
               </a:rPr>
-              <a:t>(stuff, spot + 1, high);</a:t>
+              <a:t>(stuff, spot + 1, end);</a:t>
             </a:r>
           </a:p>
           <a:p>
